--- a/AppStudioX_TechTalent_Partnership_Deck.pptx
+++ b/AppStudioX_TechTalent_Partnership_Deck.pptx
@@ -4929,7 +4929,7 @@
                 </a:solidFill>
                 <a:latin typeface="Calibri"/>
               </a:rPr>
-              <a:t>✓  Clear 6-month replacement guarantee on every placement</a:t>
+              <a:t>✓  Clear post-placement assurance — we re-engage at no additional fee</a:t>
             </a:r>
           </a:p>
         </p:txBody>
@@ -15147,7 +15147,7 @@
                 </a:solidFill>
                 <a:latin typeface="Calibri"/>
               </a:rPr>
-              <a:t>All engagements include a replacement guarantee. If a placed candidate leaves within 6 months, we fill the role again at no additional fee.</a:t>
+              <a:t>All engagements include a post-placement assurance. If a placed candidate exits early, we re-engage the search at no additional retainer fee.</a:t>
             </a:r>
           </a:p>
         </p:txBody>
@@ -16923,7 +16923,7 @@
                 </a:solidFill>
                 <a:latin typeface="Calibri"/>
               </a:rPr>
-              <a:t>Replacement Guarantee</a:t>
+              <a:t>Post-Placement Assurance</a:t>
             </a:r>
           </a:p>
         </p:txBody>
@@ -16958,7 +16958,7 @@
                 </a:solidFill>
                 <a:latin typeface="Calibri"/>
               </a:rPr>
-              <a:t>6-month replacement guarantee at no additional fee. We stand behind every placement we make.</a:t>
+              <a:t>If a placed candidate exits early, we re-engage the search at no additional retainer. We stand behind every placement we make.</a:t>
             </a:r>
           </a:p>
         </p:txBody>
